--- a/docs/Step1仕様書.pptx
+++ b/docs/Step1仕様書.pptx
@@ -262,7 +262,7 @@
           <a:p>
             <a:fld id="{94165FF4-FB7B-4546-AEDF-E8D6362B3E6C}" type="datetimeFigureOut">
               <a:rPr kumimoji="1" lang="ja-JP" altLang="en-US" smtClean="0"/>
-              <a:t>2026/6/3</a:t>
+              <a:t>2026/7/8</a:t>
             </a:fld>
             <a:endParaRPr kumimoji="1" lang="ja-JP" altLang="en-US"/>
           </a:p>
@@ -492,7 +492,7 @@
           <a:p>
             <a:fld id="{94165FF4-FB7B-4546-AEDF-E8D6362B3E6C}" type="datetimeFigureOut">
               <a:rPr kumimoji="1" lang="ja-JP" altLang="en-US" smtClean="0"/>
-              <a:t>2026/6/3</a:t>
+              <a:t>2026/7/8</a:t>
             </a:fld>
             <a:endParaRPr kumimoji="1" lang="ja-JP" altLang="en-US"/>
           </a:p>
@@ -732,7 +732,7 @@
           <a:p>
             <a:fld id="{94165FF4-FB7B-4546-AEDF-E8D6362B3E6C}" type="datetimeFigureOut">
               <a:rPr kumimoji="1" lang="ja-JP" altLang="en-US" smtClean="0"/>
-              <a:t>2026/6/3</a:t>
+              <a:t>2026/7/8</a:t>
             </a:fld>
             <a:endParaRPr kumimoji="1" lang="ja-JP" altLang="en-US"/>
           </a:p>
@@ -962,7 +962,7 @@
           <a:p>
             <a:fld id="{94165FF4-FB7B-4546-AEDF-E8D6362B3E6C}" type="datetimeFigureOut">
               <a:rPr kumimoji="1" lang="ja-JP" altLang="en-US" smtClean="0"/>
-              <a:t>2026/6/3</a:t>
+              <a:t>2026/7/8</a:t>
             </a:fld>
             <a:endParaRPr kumimoji="1" lang="ja-JP" altLang="en-US"/>
           </a:p>
@@ -1237,7 +1237,7 @@
           <a:p>
             <a:fld id="{94165FF4-FB7B-4546-AEDF-E8D6362B3E6C}" type="datetimeFigureOut">
               <a:rPr kumimoji="1" lang="ja-JP" altLang="en-US" smtClean="0"/>
-              <a:t>2026/6/3</a:t>
+              <a:t>2026/7/8</a:t>
             </a:fld>
             <a:endParaRPr kumimoji="1" lang="ja-JP" altLang="en-US"/>
           </a:p>
@@ -1566,7 +1566,7 @@
           <a:p>
             <a:fld id="{94165FF4-FB7B-4546-AEDF-E8D6362B3E6C}" type="datetimeFigureOut">
               <a:rPr kumimoji="1" lang="ja-JP" altLang="en-US" smtClean="0"/>
-              <a:t>2026/6/3</a:t>
+              <a:t>2026/7/8</a:t>
             </a:fld>
             <a:endParaRPr kumimoji="1" lang="ja-JP" altLang="en-US"/>
           </a:p>
@@ -2042,7 +2042,7 @@
           <a:p>
             <a:fld id="{94165FF4-FB7B-4546-AEDF-E8D6362B3E6C}" type="datetimeFigureOut">
               <a:rPr kumimoji="1" lang="ja-JP" altLang="en-US" smtClean="0"/>
-              <a:t>2026/6/3</a:t>
+              <a:t>2026/7/8</a:t>
             </a:fld>
             <a:endParaRPr kumimoji="1" lang="ja-JP" altLang="en-US"/>
           </a:p>
@@ -2183,7 +2183,7 @@
           <a:p>
             <a:fld id="{94165FF4-FB7B-4546-AEDF-E8D6362B3E6C}" type="datetimeFigureOut">
               <a:rPr kumimoji="1" lang="ja-JP" altLang="en-US" smtClean="0"/>
-              <a:t>2026/6/3</a:t>
+              <a:t>2026/7/8</a:t>
             </a:fld>
             <a:endParaRPr kumimoji="1" lang="ja-JP" altLang="en-US"/>
           </a:p>
@@ -2296,7 +2296,7 @@
           <a:p>
             <a:fld id="{94165FF4-FB7B-4546-AEDF-E8D6362B3E6C}" type="datetimeFigureOut">
               <a:rPr kumimoji="1" lang="ja-JP" altLang="en-US" smtClean="0"/>
-              <a:t>2026/6/3</a:t>
+              <a:t>2026/7/8</a:t>
             </a:fld>
             <a:endParaRPr kumimoji="1" lang="ja-JP" altLang="en-US"/>
           </a:p>
@@ -2639,7 +2639,7 @@
           <a:p>
             <a:fld id="{94165FF4-FB7B-4546-AEDF-E8D6362B3E6C}" type="datetimeFigureOut">
               <a:rPr kumimoji="1" lang="ja-JP" altLang="en-US" smtClean="0"/>
-              <a:t>2026/6/3</a:t>
+              <a:t>2026/7/8</a:t>
             </a:fld>
             <a:endParaRPr kumimoji="1" lang="ja-JP" altLang="en-US"/>
           </a:p>
@@ -2927,7 +2927,7 @@
           <a:p>
             <a:fld id="{94165FF4-FB7B-4546-AEDF-E8D6362B3E6C}" type="datetimeFigureOut">
               <a:rPr kumimoji="1" lang="ja-JP" altLang="en-US" smtClean="0"/>
-              <a:t>2026/6/3</a:t>
+              <a:t>2026/7/8</a:t>
             </a:fld>
             <a:endParaRPr kumimoji="1" lang="ja-JP" altLang="en-US"/>
           </a:p>
@@ -3200,7 +3200,7 @@
           <a:p>
             <a:fld id="{94165FF4-FB7B-4546-AEDF-E8D6362B3E6C}" type="datetimeFigureOut">
               <a:rPr kumimoji="1" lang="ja-JP" altLang="en-US" smtClean="0"/>
-              <a:t>2026/6/3</a:t>
+              <a:t>2026/7/8</a:t>
             </a:fld>
             <a:endParaRPr kumimoji="1" lang="ja-JP" altLang="en-US"/>
           </a:p>
@@ -8202,7 +8202,7 @@
                   <a:schemeClr val="tx1"/>
                 </a:solidFill>
               </a:rPr>
-              <a:t>担っている場合、自動運転開始時に日時を格納</a:t>
+              <a:t>になっている場合、自動運転開始時に日時を格納</a:t>
             </a:r>
             <a:endParaRPr kumimoji="1" lang="en-US" altLang="ja-JP" sz="900" dirty="0">
               <a:solidFill>
@@ -8425,7 +8425,7 @@
             <a:avLst/>
           </a:prstGeom>
           <a:noFill/>
-          <a:ln>
+          <a:ln cmpd="dbl">
             <a:solidFill>
               <a:schemeClr val="tx1"/>
             </a:solidFill>
@@ -9041,6 +9041,65 @@
               <a:rPr lang="en-US" altLang="ja-JP" sz="900" dirty="0"/>
               <a:t>2026.6.2</a:t>
             </a:r>
+          </a:p>
+        </p:txBody>
+      </p:sp>
+      <p:sp>
+        <p:nvSpPr>
+          <p:cNvPr id="4" name="テキスト ボックス 3">
+            <a:extLst>
+              <a:ext uri="{FF2B5EF4-FFF2-40B4-BE49-F238E27FC236}">
+                <a16:creationId xmlns:a16="http://schemas.microsoft.com/office/drawing/2014/main" id="{93833BBF-B10A-2460-AA6A-E6E52572EECA}"/>
+              </a:ext>
+            </a:extLst>
+          </p:cNvPr>
+          <p:cNvSpPr txBox="1"/>
+          <p:nvPr/>
+        </p:nvSpPr>
+        <p:spPr>
+          <a:xfrm>
+            <a:off x="2063469" y="1873215"/>
+            <a:ext cx="1851051" cy="369332"/>
+          </a:xfrm>
+          <a:prstGeom prst="rect">
+            <a:avLst/>
+          </a:prstGeom>
+          <a:noFill/>
+        </p:spPr>
+        <p:txBody>
+          <a:bodyPr wrap="square">
+            <a:spAutoFit/>
+          </a:bodyPr>
+          <a:lstStyle/>
+          <a:p>
+            <a:r>
+              <a:rPr lang="ja-JP" altLang="en-US" sz="900" dirty="0">
+                <a:solidFill>
+                  <a:srgbClr val="C00000"/>
+                </a:solidFill>
+              </a:rPr>
+              <a:t>＊この処理は最重要</a:t>
+            </a:r>
+            <a:endParaRPr lang="en-US" altLang="ja-JP" sz="900" dirty="0">
+              <a:solidFill>
+                <a:srgbClr val="C00000"/>
+              </a:solidFill>
+            </a:endParaRPr>
+          </a:p>
+          <a:p>
+            <a:r>
+              <a:rPr lang="ja-JP" altLang="en-US" sz="900" dirty="0">
+                <a:solidFill>
+                  <a:srgbClr val="C00000"/>
+                </a:solidFill>
+              </a:rPr>
+              <a:t>→アルゴリズム間違えないこと</a:t>
+            </a:r>
+            <a:endParaRPr lang="en-US" altLang="ja-JP" sz="900" dirty="0">
+              <a:solidFill>
+                <a:srgbClr val="C00000"/>
+              </a:solidFill>
+            </a:endParaRPr>
           </a:p>
         </p:txBody>
       </p:sp>
@@ -9509,7 +9568,7 @@
         <p:spPr>
           <a:xfrm>
             <a:off x="1444428" y="1218240"/>
-            <a:ext cx="3329873" cy="230832"/>
+            <a:ext cx="4390315" cy="369332"/>
           </a:xfrm>
           <a:prstGeom prst="rect">
             <a:avLst/>
@@ -9525,6 +9584,17 @@
             <a:r>
               <a:rPr lang="ja-JP" altLang="en-US" sz="900" dirty="0"/>
               <a:t>作業者：アプリ起動＋言語選択（日本語／英語）</a:t>
+            </a:r>
+            <a:endParaRPr lang="en-US" altLang="ja-JP" sz="900" dirty="0"/>
+          </a:p>
+          <a:p>
+            <a:r>
+              <a:rPr lang="en-US" altLang="ja-JP" sz="900" dirty="0"/>
+              <a:t>※</a:t>
+            </a:r>
+            <a:r>
+              <a:rPr lang="ja-JP" altLang="en-US" sz="900" dirty="0"/>
+              <a:t>アプリは起動したままを想定する</a:t>
             </a:r>
             <a:endParaRPr lang="en-US" altLang="ja-JP" sz="900" dirty="0"/>
           </a:p>
@@ -9622,7 +9692,7 @@
             </a:r>
             <a:r>
               <a:rPr lang="ja-JP" altLang="en-US" sz="900" dirty="0"/>
-              <a:t>データ入力）</a:t>
+              <a:t>データを入力）</a:t>
             </a:r>
             <a:endParaRPr lang="en-US" altLang="ja-JP" sz="900" dirty="0"/>
           </a:p>
@@ -9688,7 +9758,7 @@
         <p:spPr>
           <a:xfrm>
             <a:off x="1445100" y="3831028"/>
-            <a:ext cx="5117541" cy="230832"/>
+            <a:ext cx="4050009" cy="230832"/>
           </a:xfrm>
           <a:prstGeom prst="rect">
             <a:avLst/>
@@ -9703,7 +9773,15 @@
           <a:p>
             <a:r>
               <a:rPr lang="ja-JP" altLang="en-US" sz="900" dirty="0"/>
-              <a:t>詳細は「画面構想</a:t>
+              <a:t>詳細は「</a:t>
+            </a:r>
+            <a:r>
+              <a:rPr lang="en-US" altLang="ja-JP" sz="900" dirty="0"/>
+              <a:t>docs/</a:t>
+            </a:r>
+            <a:r>
+              <a:rPr lang="ja-JP" altLang="en-US" sz="900" dirty="0"/>
+              <a:t>画面構想</a:t>
             </a:r>
             <a:r>
               <a:rPr lang="en-US" altLang="ja-JP" sz="900" dirty="0"/>
@@ -9901,6 +9979,41 @@
           </a:p>
         </p:txBody>
       </p:sp>
+      <p:pic>
+        <p:nvPicPr>
+          <p:cNvPr id="5" name="図 4">
+            <a:extLst>
+              <a:ext uri="{FF2B5EF4-FFF2-40B4-BE49-F238E27FC236}">
+                <a16:creationId xmlns:a16="http://schemas.microsoft.com/office/drawing/2014/main" id="{F71F76E6-1B62-6C6C-6A77-0ABC04BBB5A6}"/>
+              </a:ext>
+            </a:extLst>
+          </p:cNvPr>
+          <p:cNvPicPr>
+            <a:picLocks noChangeAspect="1"/>
+          </p:cNvPicPr>
+          <p:nvPr/>
+        </p:nvPicPr>
+        <p:blipFill>
+          <a:blip r:embed="rId2"/>
+          <a:stretch>
+            <a:fillRect/>
+          </a:stretch>
+        </p:blipFill>
+        <p:spPr>
+          <a:xfrm>
+            <a:off x="5947955" y="3360754"/>
+            <a:ext cx="6096000" cy="3276600"/>
+          </a:xfrm>
+          <a:prstGeom prst="rect">
+            <a:avLst/>
+          </a:prstGeom>
+          <a:ln>
+            <a:solidFill>
+              <a:schemeClr val="tx1"/>
+            </a:solidFill>
+          </a:ln>
+        </p:spPr>
+      </p:pic>
     </p:spTree>
     <p:extLst>
       <p:ext uri="{BB962C8B-B14F-4D97-AF65-F5344CB8AC3E}">
@@ -9937,6 +10050,266 @@
           <a:chExt cx="0" cy="0"/>
         </a:xfrm>
       </p:grpSpPr>
+      <p:sp>
+        <p:nvSpPr>
+          <p:cNvPr id="3" name="テキスト ボックス 2">
+            <a:extLst>
+              <a:ext uri="{FF2B5EF4-FFF2-40B4-BE49-F238E27FC236}">
+                <a16:creationId xmlns:a16="http://schemas.microsoft.com/office/drawing/2014/main" id="{F72DD108-E0E3-F231-19F7-48CF96785230}"/>
+              </a:ext>
+            </a:extLst>
+          </p:cNvPr>
+          <p:cNvSpPr txBox="1"/>
+          <p:nvPr/>
+        </p:nvSpPr>
+        <p:spPr>
+          <a:xfrm>
+            <a:off x="203746" y="162142"/>
+            <a:ext cx="3976367" cy="400110"/>
+          </a:xfrm>
+          <a:prstGeom prst="rect">
+            <a:avLst/>
+          </a:prstGeom>
+          <a:noFill/>
+        </p:spPr>
+        <p:txBody>
+          <a:bodyPr wrap="square" rtlCol="0">
+            <a:spAutoFit/>
+          </a:bodyPr>
+          <a:lstStyle/>
+          <a:p>
+            <a:r>
+              <a:rPr kumimoji="1" lang="en-US" altLang="ja-JP" sz="2000" u="sng" dirty="0"/>
+              <a:t>OK</a:t>
+            </a:r>
+            <a:r>
+              <a:rPr kumimoji="1" lang="ja-JP" altLang="en-US" sz="2000" u="sng" dirty="0"/>
+              <a:t>総数と</a:t>
+            </a:r>
+            <a:r>
+              <a:rPr kumimoji="1" lang="en-US" altLang="ja-JP" sz="2000" u="sng" dirty="0"/>
+              <a:t>NG</a:t>
+            </a:r>
+            <a:r>
+              <a:rPr kumimoji="1" lang="ja-JP" altLang="en-US" sz="2000" u="sng" dirty="0"/>
+              <a:t>総数について</a:t>
+            </a:r>
+            <a:endParaRPr kumimoji="1" lang="en-US" altLang="ja-JP" sz="2000" u="sng" dirty="0"/>
+          </a:p>
+        </p:txBody>
+      </p:sp>
+      <p:sp>
+        <p:nvSpPr>
+          <p:cNvPr id="5" name="テキスト ボックス 4">
+            <a:extLst>
+              <a:ext uri="{FF2B5EF4-FFF2-40B4-BE49-F238E27FC236}">
+                <a16:creationId xmlns:a16="http://schemas.microsoft.com/office/drawing/2014/main" id="{BAFEAAAC-ED67-F4B2-1FEE-8CC57BB509E8}"/>
+              </a:ext>
+            </a:extLst>
+          </p:cNvPr>
+          <p:cNvSpPr txBox="1"/>
+          <p:nvPr/>
+        </p:nvSpPr>
+        <p:spPr>
+          <a:xfrm>
+            <a:off x="277478" y="840024"/>
+            <a:ext cx="4559863" cy="600164"/>
+          </a:xfrm>
+          <a:prstGeom prst="rect">
+            <a:avLst/>
+          </a:prstGeom>
+          <a:noFill/>
+        </p:spPr>
+        <p:txBody>
+          <a:bodyPr wrap="square">
+            <a:spAutoFit/>
+          </a:bodyPr>
+          <a:lstStyle/>
+          <a:p>
+            <a:r>
+              <a:rPr lang="ja-JP" altLang="en-US" sz="1200" dirty="0"/>
+              <a:t>基本ルール：</a:t>
+            </a:r>
+            <a:r>
+              <a:rPr lang="en-US" altLang="ja-JP" sz="1200" dirty="0"/>
+              <a:t>OK</a:t>
+            </a:r>
+            <a:r>
+              <a:rPr lang="ja-JP" altLang="en-US" sz="1200" dirty="0"/>
+              <a:t>総数と</a:t>
+            </a:r>
+            <a:r>
+              <a:rPr lang="en-US" altLang="ja-JP" sz="1200" dirty="0"/>
+              <a:t>NG</a:t>
+            </a:r>
+            <a:r>
+              <a:rPr lang="ja-JP" altLang="en-US" sz="1200" dirty="0"/>
+              <a:t>総数は発生毎にインクリメントする</a:t>
+            </a:r>
+            <a:endParaRPr lang="en-US" altLang="ja-JP" sz="1200" dirty="0"/>
+          </a:p>
+          <a:p>
+            <a:r>
+              <a:rPr lang="ja-JP" altLang="en-US" sz="1200" dirty="0"/>
+              <a:t>　　　　　　（演算で合計しない）</a:t>
+            </a:r>
+            <a:endParaRPr lang="en-US" altLang="ja-JP" sz="1200" dirty="0"/>
+          </a:p>
+          <a:p>
+            <a:endParaRPr lang="en-US" altLang="ja-JP" sz="900" dirty="0"/>
+          </a:p>
+        </p:txBody>
+      </p:sp>
+      <p:sp>
+        <p:nvSpPr>
+          <p:cNvPr id="6" name="テキスト ボックス 5">
+            <a:extLst>
+              <a:ext uri="{FF2B5EF4-FFF2-40B4-BE49-F238E27FC236}">
+                <a16:creationId xmlns:a16="http://schemas.microsoft.com/office/drawing/2014/main" id="{7BE88C97-5A52-347C-A5D7-9B4F0E48A754}"/>
+              </a:ext>
+            </a:extLst>
+          </p:cNvPr>
+          <p:cNvSpPr txBox="1"/>
+          <p:nvPr/>
+        </p:nvSpPr>
+        <p:spPr>
+          <a:xfrm>
+            <a:off x="277478" y="1606378"/>
+            <a:ext cx="7403482" cy="2077492"/>
+          </a:xfrm>
+          <a:prstGeom prst="rect">
+            <a:avLst/>
+          </a:prstGeom>
+          <a:noFill/>
+        </p:spPr>
+        <p:txBody>
+          <a:bodyPr wrap="square">
+            <a:spAutoFit/>
+          </a:bodyPr>
+          <a:lstStyle/>
+          <a:p>
+            <a:r>
+              <a:rPr lang="ja-JP" altLang="en-US" sz="1200" dirty="0"/>
+              <a:t>理由</a:t>
+            </a:r>
+            <a:endParaRPr lang="en-US" altLang="ja-JP" sz="1200" dirty="0"/>
+          </a:p>
+          <a:p>
+            <a:r>
+              <a:rPr lang="en-US" altLang="ja-JP" sz="1200" dirty="0"/>
+              <a:t>1</a:t>
+            </a:r>
+            <a:r>
+              <a:rPr lang="ja-JP" altLang="en-US" sz="1200" dirty="0"/>
+              <a:t>つのロットに対し何回検査したかが不明であるため。</a:t>
+            </a:r>
+            <a:endParaRPr lang="en-US" altLang="ja-JP" sz="1200" dirty="0"/>
+          </a:p>
+          <a:p>
+            <a:r>
+              <a:rPr lang="ja-JP" altLang="en-US" sz="1200" dirty="0"/>
+              <a:t>分かりやすいシステムにするため。</a:t>
+            </a:r>
+            <a:endParaRPr lang="en-US" altLang="ja-JP" sz="1200" dirty="0"/>
+          </a:p>
+          <a:p>
+            <a:endParaRPr lang="en-US" altLang="ja-JP" sz="1200" dirty="0"/>
+          </a:p>
+          <a:p>
+            <a:r>
+              <a:rPr lang="ja-JP" altLang="en-US" sz="1200" dirty="0"/>
+              <a:t>例えば、</a:t>
+            </a:r>
+            <a:br>
+              <a:rPr lang="en-US" altLang="ja-JP" sz="1200" dirty="0"/>
+            </a:br>
+            <a:r>
+              <a:rPr lang="en-US" altLang="ja-JP" sz="1200" dirty="0"/>
+              <a:t>3</a:t>
+            </a:r>
+            <a:r>
+              <a:rPr lang="ja-JP" altLang="en-US" sz="1200" dirty="0"/>
+              <a:t>回検査した場合は、</a:t>
+            </a:r>
+            <a:r>
+              <a:rPr lang="en-US" altLang="ja-JP" sz="1200" dirty="0"/>
+              <a:t>3</a:t>
+            </a:r>
+            <a:r>
+              <a:rPr lang="ja-JP" altLang="en-US" sz="1200" dirty="0"/>
+              <a:t>回目の</a:t>
+            </a:r>
+            <a:r>
+              <a:rPr lang="en-US" altLang="ja-JP" sz="1200" dirty="0"/>
+              <a:t>OK</a:t>
+            </a:r>
+            <a:r>
+              <a:rPr lang="ja-JP" altLang="en-US" sz="1200" dirty="0"/>
+              <a:t>カウンタが存在しないため演算できない</a:t>
+            </a:r>
+            <a:endParaRPr lang="en-US" altLang="ja-JP" sz="1200" dirty="0"/>
+          </a:p>
+          <a:p>
+            <a:endParaRPr lang="en-US" altLang="ja-JP" sz="1200" dirty="0"/>
+          </a:p>
+          <a:p>
+            <a:r>
+              <a:rPr lang="en-US" altLang="ja-JP" sz="1200" dirty="0"/>
+              <a:t>1</a:t>
+            </a:r>
+            <a:r>
+              <a:rPr lang="ja-JP" altLang="en-US" sz="1200" dirty="0"/>
+              <a:t>回目と</a:t>
+            </a:r>
+            <a:r>
+              <a:rPr lang="en-US" altLang="ja-JP" sz="1200" dirty="0"/>
+              <a:t>2</a:t>
+            </a:r>
+            <a:r>
+              <a:rPr lang="ja-JP" altLang="en-US" sz="1200" dirty="0"/>
+              <a:t>回目の</a:t>
+            </a:r>
+            <a:r>
+              <a:rPr lang="en-US" altLang="ja-JP" sz="1200" dirty="0"/>
+              <a:t>OK</a:t>
+            </a:r>
+            <a:r>
+              <a:rPr lang="ja-JP" altLang="en-US" sz="1200" dirty="0"/>
+              <a:t>カウンタ、</a:t>
+            </a:r>
+            <a:r>
+              <a:rPr lang="en-US" altLang="ja-JP" sz="1200" dirty="0"/>
+              <a:t>NG</a:t>
+            </a:r>
+            <a:r>
+              <a:rPr lang="ja-JP" altLang="en-US" sz="1200" dirty="0"/>
+              <a:t>カウンタは残す</a:t>
+            </a:r>
+            <a:endParaRPr lang="en-US" altLang="ja-JP" sz="1200" dirty="0"/>
+          </a:p>
+          <a:p>
+            <a:r>
+              <a:rPr lang="ja-JP" altLang="en-US" sz="1200" dirty="0"/>
+              <a:t>（</a:t>
+            </a:r>
+            <a:r>
+              <a:rPr lang="en-US" altLang="ja-JP" sz="1200" dirty="0"/>
+              <a:t>DB</a:t>
+            </a:r>
+            <a:r>
+              <a:rPr lang="ja-JP" altLang="en-US" sz="1200" dirty="0"/>
+              <a:t>に記録しないが、将来的に追加する可能性があるため）</a:t>
+            </a:r>
+            <a:endParaRPr lang="en-US" altLang="ja-JP" sz="1200" dirty="0"/>
+          </a:p>
+          <a:p>
+            <a:endParaRPr lang="en-US" altLang="ja-JP" sz="1200" dirty="0"/>
+          </a:p>
+          <a:p>
+            <a:endParaRPr lang="en-US" altLang="ja-JP" sz="900" dirty="0"/>
+          </a:p>
+        </p:txBody>
+      </p:sp>
     </p:spTree>
     <p:extLst>
       <p:ext uri="{BB962C8B-B14F-4D97-AF65-F5344CB8AC3E}">
